--- a/classes/parte-8-blue-team-deteccion-y-soc/184-splunk-para-deteccion/clase-184-presentacion.pptx
+++ b/classes/parte-8-blue-team-deteccion-y-soc/184-splunk-para-deteccion/clase-184-presentacion.pptx
@@ -17,6 +17,11 @@
     <p:sldId id="265" r:id="rId16"/>
     <p:sldId id="266" r:id="rId17"/>
     <p:sldId id="267" r:id="rId18"/>
+    <p:sldId id="268" r:id="rId19"/>
+    <p:sldId id="269" r:id="rId20"/>
+    <p:sldId id="270" r:id="rId21"/>
+    <p:sldId id="271" r:id="rId22"/>
+    <p:sldId id="272" r:id="rId23"/>
   </p:sldIdLst>
   <p:sldSz cx="9144000" cy="6858000" type="screen4x3"/>
   <p:notesSz cx="6858000" cy="9144000"/>
@@ -3198,7 +3203,7 @@
                   <a:srgbClr val="0B3D2E"/>
                 </a:solidFill>
               </a:rPr>
-              <a:t>⚠️ Errores comunes</a:t>
+              <a:t>🧰 Herramientas y preparación</a:t>
             </a:r>
           </a:p>
         </p:txBody>
@@ -3236,67 +3241,67 @@
                   <a:srgbClr val="22282E"/>
                 </a:solidFill>
               </a:rPr>
-              <a:t>•  Búsqueda tarda minutos — Escaneas eventos crudos; usa tstats/modelos de datos</a:t>
-            </a:r>
-          </a:p>
-          <a:p>
-            <a:pPr>
-              <a:spcAft>
-                <a:spcPts val="600"/>
-              </a:spcAft>
-            </a:pPr>
-            <a:r>
-              <a:rPr sz="1500">
-                <a:solidFill>
-                  <a:srgbClr val="22282E"/>
-                </a:solidFill>
-              </a:rPr>
-              <a:t>•  stats no agrupa como esperas — Campo no extraído o mal nombrado; verifica con \</a:t>
-            </a:r>
-          </a:p>
-          <a:p>
-            <a:pPr>
-              <a:spcAft>
-                <a:spcPts val="600"/>
-              </a:spcAft>
-            </a:pPr>
-            <a:r>
-              <a:rPr sz="1500">
-                <a:solidFill>
-                  <a:srgbClr val="22282E"/>
-                </a:solidFill>
-              </a:rPr>
-              <a:t>•  Alerta dispara sin parar — Falta throttling; añade supresión por entidad</a:t>
-            </a:r>
-          </a:p>
-          <a:p>
-            <a:pPr>
-              <a:spcAft>
-                <a:spcPts val="600"/>
-              </a:spcAft>
-            </a:pPr>
-            <a:r>
-              <a:rPr sz="1500">
-                <a:solidFill>
-                  <a:srgbClr val="22282E"/>
-                </a:solidFill>
-              </a:rPr>
-              <a:t>•  Resultados vacíos pero hay datos — Rango de tiempo o índice equivocado; revisa el time picker</a:t>
-            </a:r>
-          </a:p>
-          <a:p>
-            <a:pPr>
-              <a:spcAft>
-                <a:spcPts val="600"/>
-              </a:spcAft>
-            </a:pPr>
-            <a:r>
-              <a:rPr sz="1500">
-                <a:solidFill>
-                  <a:srgbClr val="22282E"/>
-                </a:solidFill>
-              </a:rPr>
-              <a:t>•  CommandLine truncado — Límite de campo; ajusta maxchars/truncation en props.conf</a:t>
+              <a:t>•  Splunk Enterprise Trial o Splunk Free en el Windows/Linux de laboratorio.</a:t>
+            </a:r>
+          </a:p>
+          <a:p>
+            <a:pPr>
+              <a:spcAft>
+                <a:spcPts val="600"/>
+              </a:spcAft>
+            </a:pPr>
+            <a:r>
+              <a:rPr sz="1500">
+                <a:solidFill>
+                  <a:srgbClr val="22282E"/>
+                </a:solidFill>
+              </a:rPr>
+              <a:t>•  Datos de muestra: la app Boss of the SOC (BOTS) de Splunk es un dataset público excelente para practicar detección.</a:t>
+            </a:r>
+          </a:p>
+          <a:p>
+            <a:pPr>
+              <a:spcAft>
+                <a:spcPts val="600"/>
+              </a:spcAft>
+            </a:pPr>
+            <a:r>
+              <a:rPr sz="1500">
+                <a:solidFill>
+                  <a:srgbClr val="22282E"/>
+                </a:solidFill>
+              </a:rPr>
+              <a:t>•  Un Universal Forwarder enviando tus Sysmon/Event Logs de la clase 182.</a:t>
+            </a:r>
+          </a:p>
+          <a:p>
+            <a:pPr>
+              <a:spcAft>
+                <a:spcPts val="600"/>
+              </a:spcAft>
+            </a:pPr>
+            <a:r>
+              <a:rPr sz="1500">
+                <a:solidFill>
+                  <a:srgbClr val="22282E"/>
+                </a:solidFill>
+              </a:rPr>
+              <a:t>•  Opcional: Splunk Security Essentials (app gratuita con ejemplos de detección mapeados a ATT&amp;CK).</a:t>
+            </a:r>
+          </a:p>
+          <a:p>
+            <a:pPr>
+              <a:spcAft>
+                <a:spcPts val="600"/>
+              </a:spcAft>
+            </a:pPr>
+            <a:r>
+              <a:rPr sz="1500">
+                <a:solidFill>
+                  <a:srgbClr val="22282E"/>
+                </a:solidFill>
+              </a:rPr>
+              <a:t>•  Practica siempre sobre datos de laboratorio o el dataset BOTS.</a:t>
             </a:r>
           </a:p>
         </p:txBody>
@@ -3347,7 +3352,7 @@
                   <a:srgbClr val="0B3D2E"/>
                 </a:solidFill>
               </a:rPr>
-              <a:t>❓ Preguntas frecuentes</a:t>
+              <a:t>🧪 Laboratorio guiado — Detecta con SPL</a:t>
             </a:r>
           </a:p>
         </p:txBody>
@@ -3385,82 +3390,97 @@
                   <a:srgbClr val="22282E"/>
                 </a:solidFill>
               </a:rPr>
-              <a:t>•  ❓ ¿stats o transaction?</a:t>
-            </a:r>
-          </a:p>
-          <a:p>
-            <a:pPr>
-              <a:spcAft>
-                <a:spcPts val="600"/>
-              </a:spcAft>
-            </a:pPr>
-            <a:r>
-              <a:rPr sz="1500">
-                <a:solidFill>
-                  <a:srgbClr val="22282E"/>
-                </a:solidFill>
-              </a:rPr>
-              <a:t>•  Prefiere stats: es mucho más eficiente. transaction solo cuando necesitas agrupar eventos por sesión con lógica de inicio/fin que stats no expresa bien.</a:t>
-            </a:r>
-          </a:p>
-          <a:p>
-            <a:pPr>
-              <a:spcAft>
-                <a:spcPts val="600"/>
-              </a:spcAft>
-            </a:pPr>
-            <a:r>
-              <a:rPr sz="1500">
-                <a:solidFill>
-                  <a:srgbClr val="22282E"/>
-                </a:solidFill>
-              </a:rPr>
-              <a:t>•  ❓ ¿Necesito Splunk ES para detectar?</a:t>
-            </a:r>
-          </a:p>
-          <a:p>
-            <a:pPr>
-              <a:spcAft>
-                <a:spcPts val="600"/>
-              </a:spcAft>
-            </a:pPr>
-            <a:r>
-              <a:rPr sz="1500">
-                <a:solidFill>
-                  <a:srgbClr val="22282E"/>
-                </a:solidFill>
-              </a:rPr>
-              <a:t>•  No para aprender. Con Splunk core y saved searches ya construyes detecciones. ES aporta gestión de notables, correlación empaquetada y flujo de incidentes en producción.</a:t>
-            </a:r>
-          </a:p>
-          <a:p>
-            <a:pPr>
-              <a:spcAft>
-                <a:spcPts val="600"/>
-              </a:spcAft>
-            </a:pPr>
-            <a:r>
-              <a:rPr sz="1500">
-                <a:solidFill>
-                  <a:srgbClr val="22282E"/>
-                </a:solidFill>
-              </a:rPr>
-              <a:t>•  ❓ ¿Por qué usar el CIM?</a:t>
-            </a:r>
-          </a:p>
-          <a:p>
-            <a:pPr>
-              <a:spcAft>
-                <a:spcPts val="600"/>
-              </a:spcAft>
-            </a:pPr>
-            <a:r>
-              <a:rPr sz="1500">
-                <a:solidFill>
-                  <a:srgbClr val="22282E"/>
-                </a:solidFill>
-              </a:rPr>
-              <a:t>•  Porque una detección escrita contra campos CIM funciona sin importar el fabricante del log, evitando reescribir por cada fuente nueva.</a:t>
+              <a:t>•  Explora los datos. Búsqueda base:</a:t>
+            </a:r>
+          </a:p>
+          <a:p>
+            <a:pPr>
+              <a:spcAft>
+                <a:spcPts val="600"/>
+              </a:spcAft>
+            </a:pPr>
+            <a:r>
+              <a:rPr sz="1500">
+                <a:solidFill>
+                  <a:srgbClr val="22282E"/>
+                </a:solidFill>
+              </a:rPr>
+              <a:t>•  index=main sourcetype=XmlWinEventLog EventCode=1 | head 20</a:t>
+            </a:r>
+          </a:p>
+          <a:p>
+            <a:pPr>
+              <a:spcAft>
+                <a:spcPts val="600"/>
+              </a:spcAft>
+            </a:pPr>
+            <a:r>
+              <a:rPr sz="1500">
+                <a:solidFill>
+                  <a:srgbClr val="22282E"/>
+                </a:solidFill>
+              </a:rPr>
+              <a:t>•  Cuenta procesos raros. Línea base de procesos por host:</a:t>
+            </a:r>
+          </a:p>
+          <a:p>
+            <a:pPr>
+              <a:spcAft>
+                <a:spcPts val="600"/>
+              </a:spcAft>
+            </a:pPr>
+            <a:r>
+              <a:rPr sz="1500">
+                <a:solidFill>
+                  <a:srgbClr val="22282E"/>
+                </a:solidFill>
+              </a:rPr>
+              <a:t>•  ... EventCode=1 | stats count by Computer, Image | sort - count</a:t>
+            </a:r>
+          </a:p>
+          <a:p>
+            <a:pPr>
+              <a:spcAft>
+                <a:spcPts val="600"/>
+              </a:spcAft>
+            </a:pPr>
+            <a:r>
+              <a:rPr sz="1500">
+                <a:solidFill>
+                  <a:srgbClr val="22282E"/>
+                </a:solidFill>
+              </a:rPr>
+              <a:t>•  Detecta ejecución sospechosa. Busca intérpretes lanzados por Office:</a:t>
+            </a:r>
+          </a:p>
+          <a:p>
+            <a:pPr>
+              <a:spcAft>
+                <a:spcPts val="600"/>
+              </a:spcAft>
+            </a:pPr>
+            <a:r>
+              <a:rPr sz="1500">
+                <a:solidFill>
+                  <a:srgbClr val="22282E"/>
+                </a:solidFill>
+              </a:rPr>
+              <a:t>•  ... EventCode=1 ParentImage="\\WINWORD.EXE" (Image="\\powershell.exe" OR Image="\\cmd.exe") | table time, Computer, ParentImage, Image, CommandLine</a:t>
+            </a:r>
+          </a:p>
+          <a:p>
+            <a:pPr>
+              <a:spcAft>
+                <a:spcPts val="600"/>
+              </a:spcAft>
+            </a:pPr>
+            <a:r>
+              <a:rPr sz="1500">
+                <a:solidFill>
+                  <a:srgbClr val="22282E"/>
+                </a:solidFill>
+              </a:rPr>
+              <a:t>•  Fuerza bruta de autenticación. Con eventos 4625/4624:</a:t>
             </a:r>
           </a:p>
         </p:txBody>
@@ -3511,7 +3531,7 @@
                   <a:srgbClr val="0B3D2E"/>
                 </a:solidFill>
               </a:rPr>
-              <a:t>🔗 Referencias</a:t>
+              <a:t>✍️ Ejercicios</a:t>
             </a:r>
           </a:p>
         </p:txBody>
@@ -3549,71 +3569,712 @@
                   <a:srgbClr val="22282E"/>
                 </a:solidFill>
               </a:rPr>
-              <a:t>•  Splunk Search Reference (SPL) — &lt;https://docs.splunk.com/Documentation/Splunk/latest/SearchReference&gt;</a:t>
-            </a:r>
-          </a:p>
-          <a:p>
-            <a:pPr>
-              <a:spcAft>
-                <a:spcPts val="600"/>
-              </a:spcAft>
-            </a:pPr>
-            <a:r>
-              <a:rPr sz="1500">
-                <a:solidFill>
-                  <a:srgbClr val="22282E"/>
-                </a:solidFill>
-              </a:rPr>
-              <a:t>•  Splunk Boss of the SOC (BOTS) datasets — &lt;https://github.com/splunk/botsv3&gt;</a:t>
-            </a:r>
-          </a:p>
-          <a:p>
-            <a:pPr>
-              <a:spcAft>
-                <a:spcPts val="600"/>
-              </a:spcAft>
-            </a:pPr>
-            <a:r>
-              <a:rPr sz="1500">
-                <a:solidFill>
-                  <a:srgbClr val="22282E"/>
-                </a:solidFill>
-              </a:rPr>
-              <a:t>•  Splunk Security Essentials — &lt;https://splunkbase.splunk.com/app/3435&gt;</a:t>
-            </a:r>
-          </a:p>
-          <a:p>
-            <a:pPr>
-              <a:spcAft>
-                <a:spcPts val="600"/>
-              </a:spcAft>
-            </a:pPr>
-            <a:r>
-              <a:rPr sz="1500">
-                <a:solidFill>
-                  <a:srgbClr val="22282E"/>
-                </a:solidFill>
-              </a:rPr>
-              <a:t>•  Murdoch, D. Blue Team Handbook: SOC, SIEM, and Threat Hunting Use Cases.</a:t>
-            </a:r>
-          </a:p>
-          <a:p>
-            <a:pPr>
-              <a:spcAft>
-                <a:spcPts val="600"/>
-              </a:spcAft>
-            </a:pPr>
-            <a:r>
-              <a:rPr sz="1500">
-                <a:solidFill>
-                  <a:srgbClr val="22282E"/>
-                </a:solidFill>
-              </a:rPr>
-              <a:t>•  Splunk Common Information Model — &lt;https://docs.splunk.com/Documentation/CIM&gt;</a:t>
-            </a:r>
-          </a:p>
-        </p:txBody>
-      </p:sp>
+              <a:t>•  Escribe una búsqueda que liste los 10 dominios DNS más consultados por host.</a:t>
+            </a:r>
+          </a:p>
+          <a:p>
+            <a:pPr>
+              <a:spcAft>
+                <a:spcPts val="600"/>
+              </a:spcAft>
+            </a:pPr>
+            <a:r>
+              <a:rPr sz="1500">
+                <a:solidFill>
+                  <a:srgbClr val="22282E"/>
+                </a:solidFill>
+              </a:rPr>
+              <a:t>•  Detecta regsvr32.exe o mshta.exe con conexión de red saliente.</a:t>
+            </a:r>
+          </a:p>
+          <a:p>
+            <a:pPr>
+              <a:spcAft>
+                <a:spcPts val="600"/>
+              </a:spcAft>
+            </a:pPr>
+            <a:r>
+              <a:rPr sz="1500">
+                <a:solidFill>
+                  <a:srgbClr val="22282E"/>
+                </a:solidFill>
+              </a:rPr>
+              <a:t>•  Construye una línea base de horas de login por usuario y marca actividad fuera de horario.</a:t>
+            </a:r>
+          </a:p>
+          <a:p>
+            <a:pPr>
+              <a:spcAft>
+                <a:spcPts val="600"/>
+              </a:spcAft>
+            </a:pPr>
+            <a:r>
+              <a:rPr sz="1500">
+                <a:solidFill>
+                  <a:srgbClr val="22282E"/>
+                </a:solidFill>
+              </a:rPr>
+              <a:t>•  Usa eval para clasificar la severidad de un evento en alta/media/baja.</a:t>
+            </a:r>
+          </a:p>
+          <a:p>
+            <a:pPr>
+              <a:spcAft>
+                <a:spcPts val="600"/>
+              </a:spcAft>
+            </a:pPr>
+            <a:r>
+              <a:rPr sz="1500">
+                <a:solidFill>
+                  <a:srgbClr val="22282E"/>
+                </a:solidFill>
+              </a:rPr>
+              <a:t>•  Convierte una búsqueda lenta en una con tstats y mide la diferencia.</a:t>
+            </a:r>
+          </a:p>
+          <a:p>
+            <a:pPr>
+              <a:spcAft>
+                <a:spcPts val="600"/>
+              </a:spcAft>
+            </a:pPr>
+            <a:r>
+              <a:rPr sz="1500">
+                <a:solidFill>
+                  <a:srgbClr val="22282E"/>
+                </a:solidFill>
+              </a:rPr>
+              <a:t>•  Crea un lookup de cuentas de servicio y suprime sus falsos positivos.</a:t>
+            </a:r>
+          </a:p>
+        </p:txBody>
+      </p:sp>
+    </p:spTree>
+  </p:cSld>
+  <p:clrMapOvr>
+    <a:masterClrMapping/>
+  </p:clrMapOvr>
+</p:sld>
+</file>
+
+<file path=ppt/slides/slide13.xml><?xml version="1.0" encoding="utf-8"?>
+<p:sld xmlns:a="http://schemas.openxmlformats.org/drawingml/2006/main" xmlns:p="http://schemas.openxmlformats.org/presentationml/2006/main" xmlns:r="http://schemas.openxmlformats.org/officeDocument/2006/relationships">
+  <p:cSld>
+    <p:spTree>
+      <p:nvGrpSpPr>
+        <p:cNvPr id="1" name=""/>
+        <p:cNvGrpSpPr/>
+        <p:nvPr/>
+      </p:nvGrpSpPr>
+      <p:grpSpPr/>
+      <p:sp>
+        <p:nvSpPr>
+          <p:cNvPr id="2" name="TextBox 1"/>
+          <p:cNvSpPr txBox="1"/>
+          <p:nvPr/>
+        </p:nvSpPr>
+        <p:spPr>
+          <a:xfrm>
+            <a:off x="457200" y="320040"/>
+            <a:ext cx="8229600" cy="822960"/>
+          </a:xfrm>
+          <a:prstGeom prst="rect">
+            <a:avLst/>
+          </a:prstGeom>
+          <a:noFill/>
+        </p:spPr>
+        <p:txBody>
+          <a:bodyPr wrap="square">
+            <a:spAutoFit/>
+          </a:bodyPr>
+          <a:lstStyle/>
+          <a:p>
+            <a:r>
+              <a:rPr sz="2600" b="1">
+                <a:solidFill>
+                  <a:srgbClr val="0B3D2E"/>
+                </a:solidFill>
+              </a:rPr>
+              <a:t>📝 Reto verificable</a:t>
+            </a:r>
+          </a:p>
+        </p:txBody>
+      </p:sp>
+      <p:sp>
+        <p:nvSpPr>
+          <p:cNvPr id="3" name="TextBox 2"/>
+          <p:cNvSpPr txBox="1"/>
+          <p:nvPr/>
+        </p:nvSpPr>
+        <p:spPr>
+          <a:xfrm>
+            <a:off x="457200" y="1280160"/>
+            <a:ext cx="8229600" cy="4937760"/>
+          </a:xfrm>
+          <a:prstGeom prst="rect">
+            <a:avLst/>
+          </a:prstGeom>
+          <a:noFill/>
+        </p:spPr>
+        <p:txBody>
+          <a:bodyPr wrap="square">
+            <a:spAutoFit/>
+          </a:bodyPr>
+          <a:lstStyle/>
+          <a:p>
+            <a:pPr>
+              <a:spcAft>
+                <a:spcPts val="600"/>
+              </a:spcAft>
+            </a:pPr>
+            <a:r>
+              <a:rPr sz="1500">
+                <a:solidFill>
+                  <a:srgbClr val="22282E"/>
+                </a:solidFill>
+              </a:rPr>
+              <a:t>•  Entrega tres búsquedas SPL de detección con su explicación y una de ellas convertida en alerta programada con throttling. Criterio de aceptación: al menos una búsqueda detecta correctamente un patrón…</a:t>
+            </a:r>
+          </a:p>
+        </p:txBody>
+      </p:sp>
+    </p:spTree>
+  </p:cSld>
+  <p:clrMapOvr>
+    <a:masterClrMapping/>
+  </p:clrMapOvr>
+</p:sld>
+</file>
+
+<file path=ppt/slides/slide14.xml><?xml version="1.0" encoding="utf-8"?>
+<p:sld xmlns:a="http://schemas.openxmlformats.org/drawingml/2006/main" xmlns:p="http://schemas.openxmlformats.org/presentationml/2006/main" xmlns:r="http://schemas.openxmlformats.org/officeDocument/2006/relationships">
+  <p:cSld>
+    <p:spTree>
+      <p:nvGrpSpPr>
+        <p:cNvPr id="1" name=""/>
+        <p:cNvGrpSpPr/>
+        <p:nvPr/>
+      </p:nvGrpSpPr>
+      <p:grpSpPr/>
+      <p:sp>
+        <p:nvSpPr>
+          <p:cNvPr id="2" name="TextBox 1"/>
+          <p:cNvSpPr txBox="1"/>
+          <p:nvPr/>
+        </p:nvSpPr>
+        <p:spPr>
+          <a:xfrm>
+            <a:off x="457200" y="320040"/>
+            <a:ext cx="8229600" cy="822960"/>
+          </a:xfrm>
+          <a:prstGeom prst="rect">
+            <a:avLst/>
+          </a:prstGeom>
+          <a:noFill/>
+        </p:spPr>
+        <p:txBody>
+          <a:bodyPr wrap="square">
+            <a:spAutoFit/>
+          </a:bodyPr>
+          <a:lstStyle/>
+          <a:p>
+            <a:r>
+              <a:rPr sz="2600" b="1">
+                <a:solidFill>
+                  <a:srgbClr val="0B3D2E"/>
+                </a:solidFill>
+              </a:rPr>
+              <a:t>⚠️ Errores comunes</a:t>
+            </a:r>
+          </a:p>
+        </p:txBody>
+      </p:sp>
+      <p:sp>
+        <p:nvSpPr>
+          <p:cNvPr id="3" name="TextBox 2"/>
+          <p:cNvSpPr txBox="1"/>
+          <p:nvPr/>
+        </p:nvSpPr>
+        <p:spPr>
+          <a:xfrm>
+            <a:off x="457200" y="1280160"/>
+            <a:ext cx="8229600" cy="4937760"/>
+          </a:xfrm>
+          <a:prstGeom prst="rect">
+            <a:avLst/>
+          </a:prstGeom>
+          <a:noFill/>
+        </p:spPr>
+        <p:txBody>
+          <a:bodyPr wrap="square">
+            <a:spAutoFit/>
+          </a:bodyPr>
+          <a:lstStyle/>
+          <a:p>
+            <a:pPr>
+              <a:spcAft>
+                <a:spcPts val="600"/>
+              </a:spcAft>
+            </a:pPr>
+            <a:r>
+              <a:rPr sz="1500">
+                <a:solidFill>
+                  <a:srgbClr val="22282E"/>
+                </a:solidFill>
+              </a:rPr>
+              <a:t>•  Búsqueda tarda minutos — Escaneas eventos crudos; usa tstats/modelos de datos</a:t>
+            </a:r>
+          </a:p>
+          <a:p>
+            <a:pPr>
+              <a:spcAft>
+                <a:spcPts val="600"/>
+              </a:spcAft>
+            </a:pPr>
+            <a:r>
+              <a:rPr sz="1500">
+                <a:solidFill>
+                  <a:srgbClr val="22282E"/>
+                </a:solidFill>
+              </a:rPr>
+              <a:t>•  stats no agrupa como esperas — Campo no extraído o mal nombrado; verifica con \</a:t>
+            </a:r>
+          </a:p>
+          <a:p>
+            <a:pPr>
+              <a:spcAft>
+                <a:spcPts val="600"/>
+              </a:spcAft>
+            </a:pPr>
+            <a:r>
+              <a:rPr sz="1500">
+                <a:solidFill>
+                  <a:srgbClr val="22282E"/>
+                </a:solidFill>
+              </a:rPr>
+              <a:t>•  Alerta dispara sin parar — Falta throttling; añade supresión por entidad</a:t>
+            </a:r>
+          </a:p>
+          <a:p>
+            <a:pPr>
+              <a:spcAft>
+                <a:spcPts val="600"/>
+              </a:spcAft>
+            </a:pPr>
+            <a:r>
+              <a:rPr sz="1500">
+                <a:solidFill>
+                  <a:srgbClr val="22282E"/>
+                </a:solidFill>
+              </a:rPr>
+              <a:t>•  Resultados vacíos pero hay datos — Rango de tiempo o índice equivocado; revisa el time picker</a:t>
+            </a:r>
+          </a:p>
+          <a:p>
+            <a:pPr>
+              <a:spcAft>
+                <a:spcPts val="600"/>
+              </a:spcAft>
+            </a:pPr>
+            <a:r>
+              <a:rPr sz="1500">
+                <a:solidFill>
+                  <a:srgbClr val="22282E"/>
+                </a:solidFill>
+              </a:rPr>
+              <a:t>•  CommandLine truncado — Límite de campo; ajusta maxchars/truncation en props.conf</a:t>
+            </a:r>
+          </a:p>
+        </p:txBody>
+      </p:sp>
+    </p:spTree>
+  </p:cSld>
+  <p:clrMapOvr>
+    <a:masterClrMapping/>
+  </p:clrMapOvr>
+</p:sld>
+</file>
+
+<file path=ppt/slides/slide15.xml><?xml version="1.0" encoding="utf-8"?>
+<p:sld xmlns:a="http://schemas.openxmlformats.org/drawingml/2006/main" xmlns:p="http://schemas.openxmlformats.org/presentationml/2006/main" xmlns:r="http://schemas.openxmlformats.org/officeDocument/2006/relationships">
+  <p:cSld>
+    <p:spTree>
+      <p:nvGrpSpPr>
+        <p:cNvPr id="1" name=""/>
+        <p:cNvGrpSpPr/>
+        <p:nvPr/>
+      </p:nvGrpSpPr>
+      <p:grpSpPr/>
+      <p:sp>
+        <p:nvSpPr>
+          <p:cNvPr id="2" name="TextBox 1"/>
+          <p:cNvSpPr txBox="1"/>
+          <p:nvPr/>
+        </p:nvSpPr>
+        <p:spPr>
+          <a:xfrm>
+            <a:off x="457200" y="320040"/>
+            <a:ext cx="8229600" cy="822960"/>
+          </a:xfrm>
+          <a:prstGeom prst="rect">
+            <a:avLst/>
+          </a:prstGeom>
+          <a:noFill/>
+        </p:spPr>
+        <p:txBody>
+          <a:bodyPr wrap="square">
+            <a:spAutoFit/>
+          </a:bodyPr>
+          <a:lstStyle/>
+          <a:p>
+            <a:r>
+              <a:rPr sz="2600" b="1">
+                <a:solidFill>
+                  <a:srgbClr val="0B3D2E"/>
+                </a:solidFill>
+              </a:rPr>
+              <a:t>❓ Preguntas frecuentes</a:t>
+            </a:r>
+          </a:p>
+        </p:txBody>
+      </p:sp>
+      <p:sp>
+        <p:nvSpPr>
+          <p:cNvPr id="3" name="TextBox 2"/>
+          <p:cNvSpPr txBox="1"/>
+          <p:nvPr/>
+        </p:nvSpPr>
+        <p:spPr>
+          <a:xfrm>
+            <a:off x="457200" y="1280160"/>
+            <a:ext cx="8229600" cy="4937760"/>
+          </a:xfrm>
+          <a:prstGeom prst="rect">
+            <a:avLst/>
+          </a:prstGeom>
+          <a:noFill/>
+        </p:spPr>
+        <p:txBody>
+          <a:bodyPr wrap="square">
+            <a:spAutoFit/>
+          </a:bodyPr>
+          <a:lstStyle/>
+          <a:p>
+            <a:pPr>
+              <a:spcAft>
+                <a:spcPts val="600"/>
+              </a:spcAft>
+            </a:pPr>
+            <a:r>
+              <a:rPr sz="1500">
+                <a:solidFill>
+                  <a:srgbClr val="22282E"/>
+                </a:solidFill>
+              </a:rPr>
+              <a:t>•  ❓ ¿stats o transaction?</a:t>
+            </a:r>
+          </a:p>
+          <a:p>
+            <a:pPr>
+              <a:spcAft>
+                <a:spcPts val="600"/>
+              </a:spcAft>
+            </a:pPr>
+            <a:r>
+              <a:rPr sz="1500">
+                <a:solidFill>
+                  <a:srgbClr val="22282E"/>
+                </a:solidFill>
+              </a:rPr>
+              <a:t>•  Prefiere stats: es mucho más eficiente. transaction solo cuando necesitas agrupar eventos por sesión con lógica de inicio/fin que stats no expresa bien.</a:t>
+            </a:r>
+          </a:p>
+          <a:p>
+            <a:pPr>
+              <a:spcAft>
+                <a:spcPts val="600"/>
+              </a:spcAft>
+            </a:pPr>
+            <a:r>
+              <a:rPr sz="1500">
+                <a:solidFill>
+                  <a:srgbClr val="22282E"/>
+                </a:solidFill>
+              </a:rPr>
+              <a:t>•  ❓ ¿Necesito Splunk ES para detectar?</a:t>
+            </a:r>
+          </a:p>
+          <a:p>
+            <a:pPr>
+              <a:spcAft>
+                <a:spcPts val="600"/>
+              </a:spcAft>
+            </a:pPr>
+            <a:r>
+              <a:rPr sz="1500">
+                <a:solidFill>
+                  <a:srgbClr val="22282E"/>
+                </a:solidFill>
+              </a:rPr>
+              <a:t>•  No para aprender. Con Splunk core y saved searches ya construyes detecciones. ES aporta gestión de notables, correlación empaquetada y flujo de incidentes en producción.</a:t>
+            </a:r>
+          </a:p>
+          <a:p>
+            <a:pPr>
+              <a:spcAft>
+                <a:spcPts val="600"/>
+              </a:spcAft>
+            </a:pPr>
+            <a:r>
+              <a:rPr sz="1500">
+                <a:solidFill>
+                  <a:srgbClr val="22282E"/>
+                </a:solidFill>
+              </a:rPr>
+              <a:t>•  ❓ ¿Por qué usar el CIM?</a:t>
+            </a:r>
+          </a:p>
+          <a:p>
+            <a:pPr>
+              <a:spcAft>
+                <a:spcPts val="600"/>
+              </a:spcAft>
+            </a:pPr>
+            <a:r>
+              <a:rPr sz="1500">
+                <a:solidFill>
+                  <a:srgbClr val="22282E"/>
+                </a:solidFill>
+              </a:rPr>
+              <a:t>•  Porque una detección escrita contra campos CIM funciona sin importar el fabricante del log, evitando reescribir por cada fuente nueva.</a:t>
+            </a:r>
+          </a:p>
+        </p:txBody>
+      </p:sp>
+    </p:spTree>
+  </p:cSld>
+  <p:clrMapOvr>
+    <a:masterClrMapping/>
+  </p:clrMapOvr>
+</p:sld>
+</file>
+
+<file path=ppt/slides/slide16.xml><?xml version="1.0" encoding="utf-8"?>
+<p:sld xmlns:a="http://schemas.openxmlformats.org/drawingml/2006/main" xmlns:p="http://schemas.openxmlformats.org/presentationml/2006/main" xmlns:r="http://schemas.openxmlformats.org/officeDocument/2006/relationships">
+  <p:cSld>
+    <p:spTree>
+      <p:nvGrpSpPr>
+        <p:cNvPr id="1" name=""/>
+        <p:cNvGrpSpPr/>
+        <p:nvPr/>
+      </p:nvGrpSpPr>
+      <p:grpSpPr/>
+      <p:sp>
+        <p:nvSpPr>
+          <p:cNvPr id="2" name="TextBox 1"/>
+          <p:cNvSpPr txBox="1"/>
+          <p:nvPr/>
+        </p:nvSpPr>
+        <p:spPr>
+          <a:xfrm>
+            <a:off x="457200" y="320040"/>
+            <a:ext cx="8229600" cy="822960"/>
+          </a:xfrm>
+          <a:prstGeom prst="rect">
+            <a:avLst/>
+          </a:prstGeom>
+          <a:noFill/>
+        </p:spPr>
+        <p:txBody>
+          <a:bodyPr wrap="square">
+            <a:spAutoFit/>
+          </a:bodyPr>
+          <a:lstStyle/>
+          <a:p>
+            <a:r>
+              <a:rPr sz="2600" b="1">
+                <a:solidFill>
+                  <a:srgbClr val="0B3D2E"/>
+                </a:solidFill>
+              </a:rPr>
+              <a:t>🔗 Referencias verificables y alcance</a:t>
+            </a:r>
+          </a:p>
+        </p:txBody>
+      </p:sp>
+      <p:sp>
+        <p:nvSpPr>
+          <p:cNvPr id="3" name="TextBox 2"/>
+          <p:cNvSpPr txBox="1"/>
+          <p:nvPr/>
+        </p:nvSpPr>
+        <p:spPr>
+          <a:xfrm>
+            <a:off x="457200" y="1280160"/>
+            <a:ext cx="8229600" cy="4937760"/>
+          </a:xfrm>
+          <a:prstGeom prst="rect">
+            <a:avLst/>
+          </a:prstGeom>
+          <a:noFill/>
+        </p:spPr>
+        <p:txBody>
+          <a:bodyPr wrap="square">
+            <a:spAutoFit/>
+          </a:bodyPr>
+          <a:lstStyle/>
+          <a:p>
+            <a:pPr>
+              <a:spcAft>
+                <a:spcPts val="600"/>
+              </a:spcAft>
+            </a:pPr>
+            <a:r>
+              <a:rPr sz="1500">
+                <a:solidFill>
+                  <a:srgbClr val="22282E"/>
+                </a:solidFill>
+              </a:rPr>
+              <a:t>•  Splunk SPL Search Reference: documentación oficial de la sintaxis y semántica de los comandos utilizados en los ejemplos —…</a:t>
+            </a:r>
+          </a:p>
+          <a:p>
+            <a:pPr>
+              <a:spcAft>
+                <a:spcPts val="600"/>
+              </a:spcAft>
+            </a:pPr>
+            <a:r>
+              <a:rPr sz="1500">
+                <a:solidFill>
+                  <a:srgbClr val="22282E"/>
+                </a:solidFill>
+              </a:rPr>
+              <a:t>•  Splunk Common Information Model: documentación oficial del modelo de datos usado por tstats; una búsqueda CIM depende de que la fuente esté normalizada y el modelo acelerado según el despliegue —…</a:t>
+            </a:r>
+          </a:p>
+          <a:p>
+            <a:pPr>
+              <a:spcAft>
+                <a:spcPts val="600"/>
+              </a:spcAft>
+            </a:pPr>
+            <a:r>
+              <a:rPr sz="1500">
+                <a:solidFill>
+                  <a:srgbClr val="22282E"/>
+                </a:solidFill>
+              </a:rPr>
+              <a:t>•  Splunk, supresión de alertas: documentación oficial para evitar notificaciones repetidas dentro de una ventana definida —…</a:t>
+            </a:r>
+          </a:p>
+          <a:p>
+            <a:pPr>
+              <a:spcAft>
+                <a:spcPts val="600"/>
+              </a:spcAft>
+            </a:pPr>
+            <a:r>
+              <a:rPr sz="1500">
+                <a:solidFill>
+                  <a:srgbClr val="22282E"/>
+                </a:solidFill>
+              </a:rPr>
+              <a:t>•  Splunk BOTS v3: repositorio público de Splunk con datos de práctica; sirve como evidencia reproducible de laboratorio, no como fuente normativa — &lt;https://github.com/splunk/botsv3&gt;</a:t>
+            </a:r>
+          </a:p>
+          <a:p>
+            <a:pPr>
+              <a:spcAft>
+                <a:spcPts val="600"/>
+              </a:spcAft>
+            </a:pPr>
+            <a:r>
+              <a:rPr sz="1500">
+                <a:solidFill>
+                  <a:srgbClr val="22282E"/>
+                </a:solidFill>
+              </a:rPr>
+              <a:t>•  Splunk Security Essentials: aplicación oficial/comunitaria de contenido para explorar casos de uso; cada ejemplo debe validarse contra los propios campos y datos —…</a:t>
+            </a:r>
+          </a:p>
+        </p:txBody>
+      </p:sp>
+    </p:spTree>
+  </p:cSld>
+  <p:clrMapOvr>
+    <a:masterClrMapping/>
+  </p:clrMapOvr>
+</p:sld>
+</file>
+
+<file path=ppt/slides/slide17.xml><?xml version="1.0" encoding="utf-8"?>
+<p:sld xmlns:a="http://schemas.openxmlformats.org/drawingml/2006/main" xmlns:p="http://schemas.openxmlformats.org/presentationml/2006/main" xmlns:r="http://schemas.openxmlformats.org/officeDocument/2006/relationships">
+  <p:cSld>
+    <p:spTree>
+      <p:nvGrpSpPr>
+        <p:cNvPr id="1" name=""/>
+        <p:cNvGrpSpPr/>
+        <p:nvPr/>
+      </p:nvGrpSpPr>
+      <p:grpSpPr/>
+      <p:sp>
+        <p:nvSpPr>
+          <p:cNvPr id="2" name="TextBox 1"/>
+          <p:cNvSpPr txBox="1"/>
+          <p:nvPr/>
+        </p:nvSpPr>
+        <p:spPr>
+          <a:xfrm>
+            <a:off x="457200" y="274320"/>
+            <a:ext cx="8229600" cy="640080"/>
+          </a:xfrm>
+          <a:prstGeom prst="rect">
+            <a:avLst/>
+          </a:prstGeom>
+          <a:noFill/>
+        </p:spPr>
+        <p:txBody>
+          <a:bodyPr wrap="square">
+            <a:spAutoFit/>
+          </a:bodyPr>
+          <a:lstStyle/>
+          <a:p>
+            <a:r>
+              <a:rPr sz="2200" b="1">
+                <a:solidFill>
+                  <a:srgbClr val="0B3D2E"/>
+                </a:solidFill>
+              </a:rPr>
+              <a:t>Diagrama de la clase</a:t>
+            </a:r>
+          </a:p>
+        </p:txBody>
+      </p:sp>
+      <p:pic>
+        <p:nvPicPr>
+          <p:cNvPr id="3" name="Picture 2" descr="bca29892d5d5172f.png"/>
+          <p:cNvPicPr>
+            <a:picLocks noChangeAspect="1"/>
+          </p:cNvPicPr>
+          <p:nvPr/>
+        </p:nvPicPr>
+        <p:blipFill>
+          <a:blip r:embed="rId2"/>
+          <a:stretch>
+            <a:fillRect/>
+          </a:stretch>
+        </p:blipFill>
+        <p:spPr>
+          <a:xfrm>
+            <a:off x="457200" y="3598164"/>
+            <a:ext cx="8229600" cy="301752"/>
+          </a:xfrm>
+          <a:prstGeom prst="rect">
+            <a:avLst/>
+          </a:prstGeom>
+        </p:spPr>
+      </p:pic>
     </p:spTree>
   </p:cSld>
   <p:clrMapOvr>
@@ -3698,7 +4359,7 @@
                   <a:srgbClr val="22282E"/>
                 </a:solidFill>
               </a:rPr>
-              <a:t>•  Dominar los fundamentos del lenguaje de búsqueda de Splunk (SPL) aplicado a detección: filtrar, transformar, agregar y correlacionar eventos para construir búsquedas de detección y alertas programadas. Splunk es uno de los SIEM más extendidos; saber consultarlo con soltura es una habilidad central del analista de SOC.</a:t>
+              <a:t>•  Dominar los fundamentos del lenguaje de búsqueda de Splunk (SPL) aplicado a detección: filtrar, transformar, agregar y correlacionar eventos para construir búsquedas de detección y alertas…</a:t>
             </a:r>
           </a:p>
         </p:txBody>
@@ -4092,7 +4753,7 @@
                   <a:srgbClr val="0B3D2E"/>
                 </a:solidFill>
               </a:rPr>
-              <a:t>📖 Definiciones y características</a:t>
+              <a:t>🧠 Explicación en profundidad</a:t>
             </a:r>
           </a:p>
         </p:txBody>
@@ -4130,97 +4791,97 @@
                   <a:srgbClr val="22282E"/>
                 </a:solidFill>
               </a:rPr>
-              <a:t>•  SPL (Search Processing Language): lenguaje de consulta de Splunk basado en tuberías (|). Característica: componible, cada comando transforma el resultado del anterior.</a:t>
-            </a:r>
-          </a:p>
-          <a:p>
-            <a:pPr>
-              <a:spcAft>
-                <a:spcPts val="600"/>
-              </a:spcAft>
-            </a:pPr>
-            <a:r>
-              <a:rPr sz="1500">
-                <a:solidFill>
-                  <a:srgbClr val="22282E"/>
-                </a:solidFill>
-              </a:rPr>
-              <a:t>•  stats: agrega eventos por campos (count by user). Característica: pieza central para líneas base y umbrales.</a:t>
-            </a:r>
-          </a:p>
-          <a:p>
-            <a:pPr>
-              <a:spcAft>
-                <a:spcPts val="600"/>
-              </a:spcAft>
-            </a:pPr>
-            <a:r>
-              <a:rPr sz="1500">
-                <a:solidFill>
-                  <a:srgbClr val="22282E"/>
-                </a:solidFill>
-              </a:rPr>
-              <a:t>•  tstats: consulta datos acelerados/indexados sin escanear eventos crudos. Característica: órdenes de magnitud más rápido.</a:t>
-            </a:r>
-          </a:p>
-          <a:p>
-            <a:pPr>
-              <a:spcAft>
-                <a:spcPts val="600"/>
-              </a:spcAft>
-            </a:pPr>
-            <a:r>
-              <a:rPr sz="1500">
-                <a:solidFill>
-                  <a:srgbClr val="22282E"/>
-                </a:solidFill>
-              </a:rPr>
-              <a:t>•  CIM (Common Information Model): esquema de normalización de Splunk. Característica: permite escribir detecciones portables entre fuentes.</a:t>
-            </a:r>
-          </a:p>
-          <a:p>
-            <a:pPr>
-              <a:spcAft>
-                <a:spcPts val="600"/>
-              </a:spcAft>
-            </a:pPr>
-            <a:r>
-              <a:rPr sz="1500">
-                <a:solidFill>
-                  <a:srgbClr val="22282E"/>
-                </a:solidFill>
-              </a:rPr>
-              <a:t>•  Lookup: tabla externa (CSV/KV) para enriquecer (ej. lista de activos críticos). Característica: cruza eventos con contexto de negocio.</a:t>
-            </a:r>
-          </a:p>
-          <a:p>
-            <a:pPr>
-              <a:spcAft>
-                <a:spcPts val="600"/>
-              </a:spcAft>
-            </a:pPr>
-            <a:r>
-              <a:rPr sz="1500">
-                <a:solidFill>
-                  <a:srgbClr val="22282E"/>
-                </a:solidFill>
-              </a:rPr>
-              <a:t>•  Saved search / alert: búsqueda guardada que corre en horario y dispara acciones. Característica: soporta throttling para evitar spam de alertas.</a:t>
-            </a:r>
-          </a:p>
-          <a:p>
-            <a:pPr>
-              <a:spcAft>
-                <a:spcPts val="600"/>
-              </a:spcAft>
-            </a:pPr>
-            <a:r>
-              <a:rPr sz="1500">
-                <a:solidFill>
-                  <a:srgbClr val="22282E"/>
-                </a:solidFill>
-              </a:rPr>
-              <a:t>•  Notable Event: alerta gestionable en Splunk ES con estado, propietario y urgencia. Característica: el objeto de trabajo del analista.</a:t>
+              <a:t>•  SPL funciona como una tubería: cada comando recibe un conjunto de resultados y produce otro. El orden importa. Filtrar temprano por tiempo, índice, sourcetype y términos selectivos reduce el trabajo…</a:t>
+            </a:r>
+          </a:p>
+          <a:p>
+            <a:pPr>
+              <a:spcAft>
+                <a:spcPts val="600"/>
+              </a:spcAft>
+            </a:pPr>
+            <a:r>
+              <a:rPr sz="1500">
+                <a:solidFill>
+                  <a:srgbClr val="22282E"/>
+                </a:solidFill>
+              </a:rPr>
+              <a:t>•  El Common Information Model no modifica mágicamente los datos: define campos y etiquetas que las fuentes deben mapear. Una búsqueda portable necesita verificar que ese mapeo esté completo y fresco.…</a:t>
+            </a:r>
+          </a:p>
+          <a:p>
+            <a:pPr>
+              <a:spcAft>
+                <a:spcPts val="600"/>
+              </a:spcAft>
+            </a:pPr>
+            <a:r>
+              <a:rPr sz="1500">
+                <a:solidFill>
+                  <a:srgbClr val="22282E"/>
+                </a:solidFill>
+              </a:rPr>
+              <a:t>•  El tuning profesional no consiste en añadir exclusiones indefinidamente. Primero se identifica qué hipótesis genera el ruido; luego se incorpora contexto estable —tipo de activo, cuenta de servicio…</a:t>
+            </a:r>
+          </a:p>
+          <a:p>
+            <a:pPr>
+              <a:spcAft>
+                <a:spcPts val="600"/>
+              </a:spcAft>
+            </a:pPr>
+            <a:r>
+              <a:rPr sz="1500">
+                <a:solidFill>
+                  <a:srgbClr val="22282E"/>
+                </a:solidFill>
+              </a:rPr>
+              <a:t>•  Considera una búsqueda que pretende encontrar muchos fallos seguidos de un éxito. El filtro inicial selecciona autenticaciones y periodo; la extracción identifica usuario, origen y resultado; la…</a:t>
+            </a:r>
+          </a:p>
+          <a:p>
+            <a:pPr>
+              <a:spcAft>
+                <a:spcPts val="600"/>
+              </a:spcAft>
+            </a:pPr>
+            <a:r>
+              <a:rPr sz="1500">
+                <a:solidFill>
+                  <a:srgbClr val="22282E"/>
+                </a:solidFill>
+              </a:rPr>
+              <a:t>•  Antes de optimizar con tstats, se ejecuta una versión transparente sobre una muestra pequeña y se inspeccionan eventos. Después se compara el resultado acelerado con esa referencia. Si CIM no mapea…</a:t>
+            </a:r>
+          </a:p>
+          <a:p>
+            <a:pPr>
+              <a:spcAft>
+                <a:spcPts val="600"/>
+              </a:spcAft>
+            </a:pPr>
+            <a:r>
+              <a:rPr sz="1500">
+                <a:solidFill>
+                  <a:srgbClr val="22282E"/>
+                </a:solidFill>
+              </a:rPr>
+              <a:t>•  Para búsquedas programadas se anota: frecuencia, ventana, retraso aceptado y clave de deduplicación. Por ejemplo, ejecutar cada cinco minutos sobre los últimos quince absorbe eventos tardíos, pero…</a:t>
+            </a:r>
+          </a:p>
+          <a:p>
+            <a:pPr>
+              <a:spcAft>
+                <a:spcPts val="600"/>
+              </a:spcAft>
+            </a:pPr>
+            <a:r>
+              <a:rPr sz="1500">
+                <a:solidFill>
+                  <a:srgbClr val="22282E"/>
+                </a:solidFill>
+              </a:rPr>
+              <a:t>•  Una búsqueda exploratoria suele comenzar con eventos crudos y table para verificar nombres y valores. Después eval construye campos derivados con una razón explícita; stats reduce filas y puede…</a:t>
             </a:r>
           </a:p>
         </p:txBody>
@@ -4271,7 +4932,7 @@
                   <a:srgbClr val="0B3D2E"/>
                 </a:solidFill>
               </a:rPr>
-              <a:t>🧰 Herramientas y preparación</a:t>
+              <a:t>📔 Glosario</a:t>
             </a:r>
           </a:p>
         </p:txBody>
@@ -4309,67 +4970,97 @@
                   <a:srgbClr val="22282E"/>
                 </a:solidFill>
               </a:rPr>
-              <a:t>•  Splunk Enterprise Trial o Splunk Free en el Windows/Linux de laboratorio.</a:t>
-            </a:r>
-          </a:p>
-          <a:p>
-            <a:pPr>
-              <a:spcAft>
-                <a:spcPts val="600"/>
-              </a:spcAft>
-            </a:pPr>
-            <a:r>
-              <a:rPr sz="1500">
-                <a:solidFill>
-                  <a:srgbClr val="22282E"/>
-                </a:solidFill>
-              </a:rPr>
-              <a:t>•  Datos de muestra: la app Boss of the SOC (BOTS) de Splunk es un dataset público excelente para practicar detección.</a:t>
-            </a:r>
-          </a:p>
-          <a:p>
-            <a:pPr>
-              <a:spcAft>
-                <a:spcPts val="600"/>
-              </a:spcAft>
-            </a:pPr>
-            <a:r>
-              <a:rPr sz="1500">
-                <a:solidFill>
-                  <a:srgbClr val="22282E"/>
-                </a:solidFill>
-              </a:rPr>
-              <a:t>•  Un Universal Forwarder enviando tus Sysmon/Event Logs de la clase 182.</a:t>
-            </a:r>
-          </a:p>
-          <a:p>
-            <a:pPr>
-              <a:spcAft>
-                <a:spcPts val="600"/>
-              </a:spcAft>
-            </a:pPr>
-            <a:r>
-              <a:rPr sz="1500">
-                <a:solidFill>
-                  <a:srgbClr val="22282E"/>
-                </a:solidFill>
-              </a:rPr>
-              <a:t>•  Opcional: Splunk Security Essentials (app gratuita con ejemplos de detección mapeados a ATT&amp;CK).</a:t>
-            </a:r>
-          </a:p>
-          <a:p>
-            <a:pPr>
-              <a:spcAft>
-                <a:spcPts val="600"/>
-              </a:spcAft>
-            </a:pPr>
-            <a:r>
-              <a:rPr sz="1500">
-                <a:solidFill>
-                  <a:srgbClr val="22282E"/>
-                </a:solidFill>
-              </a:rPr>
-              <a:t>•  Practica siempre sobre datos de laboratorio o el dataset BOTS.</a:t>
+              <a:t>•  SPL: lenguaje de búsqueda de Splunk.</a:t>
+            </a:r>
+          </a:p>
+          <a:p>
+            <a:pPr>
+              <a:spcAft>
+                <a:spcPts val="600"/>
+              </a:spcAft>
+            </a:pPr>
+            <a:r>
+              <a:rPr sz="1500">
+                <a:solidFill>
+                  <a:srgbClr val="22282E"/>
+                </a:solidFill>
+              </a:rPr>
+              <a:t>•  Sourcetype: clasificación que guía cómo interpretar eventos.</a:t>
+            </a:r>
+          </a:p>
+          <a:p>
+            <a:pPr>
+              <a:spcAft>
+                <a:spcPts val="600"/>
+              </a:spcAft>
+            </a:pPr>
+            <a:r>
+              <a:rPr sz="1500">
+                <a:solidFill>
+                  <a:srgbClr val="22282E"/>
+                </a:solidFill>
+              </a:rPr>
+              <a:t>•  Pipeline: secuencia de comandos separados por |.</a:t>
+            </a:r>
+          </a:p>
+          <a:p>
+            <a:pPr>
+              <a:spcAft>
+                <a:spcPts val="600"/>
+              </a:spcAft>
+            </a:pPr>
+            <a:r>
+              <a:rPr sz="1500">
+                <a:solidFill>
+                  <a:srgbClr val="22282E"/>
+                </a:solidFill>
+              </a:rPr>
+              <a:t>•  Transformación: operación que resume o cambia el conjunto de resultados.</a:t>
+            </a:r>
+          </a:p>
+          <a:p>
+            <a:pPr>
+              <a:spcAft>
+                <a:spcPts val="600"/>
+              </a:spcAft>
+            </a:pPr>
+            <a:r>
+              <a:rPr sz="1500">
+                <a:solidFill>
+                  <a:srgbClr val="22282E"/>
+                </a:solidFill>
+              </a:rPr>
+              <a:t>•  CIM: modelo común de campos y datasets de Splunk.</a:t>
+            </a:r>
+          </a:p>
+          <a:p>
+            <a:pPr>
+              <a:spcAft>
+                <a:spcPts val="600"/>
+              </a:spcAft>
+            </a:pPr>
+            <a:r>
+              <a:rPr sz="1500">
+                <a:solidFill>
+                  <a:srgbClr val="22282E"/>
+                </a:solidFill>
+              </a:rPr>
+              <a:t>•  Data model acceleration: materialización que permite consultas tstats más rápidas.</a:t>
+            </a:r>
+          </a:p>
+          <a:p>
+            <a:pPr>
+              <a:spcAft>
+                <a:spcPts val="600"/>
+              </a:spcAft>
+            </a:pPr>
+            <a:r>
+              <a:rPr sz="1500">
+                <a:solidFill>
+                  <a:srgbClr val="22282E"/>
+                </a:solidFill>
+              </a:rPr>
+              <a:t>•  Notable: evento de seguridad promovido para triaje.</a:t>
             </a:r>
           </a:p>
         </p:txBody>
@@ -4420,7 +5111,7 @@
                   <a:srgbClr val="0B3D2E"/>
                 </a:solidFill>
               </a:rPr>
-              <a:t>🧪 Laboratorio guiado — Detecta con SPL</a:t>
+              <a:t>📖 Definiciones y características</a:t>
             </a:r>
           </a:p>
         </p:txBody>
@@ -4458,97 +5149,97 @@
                   <a:srgbClr val="22282E"/>
                 </a:solidFill>
               </a:rPr>
-              <a:t>•  Explora los datos. Búsqueda base:</a:t>
-            </a:r>
-          </a:p>
-          <a:p>
-            <a:pPr>
-              <a:spcAft>
-                <a:spcPts val="600"/>
-              </a:spcAft>
-            </a:pPr>
-            <a:r>
-              <a:rPr sz="1500">
-                <a:solidFill>
-                  <a:srgbClr val="22282E"/>
-                </a:solidFill>
-              </a:rPr>
-              <a:t>•  index=main sourcetype=XmlWinEventLog EventCode=1 | head 20</a:t>
-            </a:r>
-          </a:p>
-          <a:p>
-            <a:pPr>
-              <a:spcAft>
-                <a:spcPts val="600"/>
-              </a:spcAft>
-            </a:pPr>
-            <a:r>
-              <a:rPr sz="1500">
-                <a:solidFill>
-                  <a:srgbClr val="22282E"/>
-                </a:solidFill>
-              </a:rPr>
-              <a:t>•  Cuenta procesos raros. Línea base de procesos por host:</a:t>
-            </a:r>
-          </a:p>
-          <a:p>
-            <a:pPr>
-              <a:spcAft>
-                <a:spcPts val="600"/>
-              </a:spcAft>
-            </a:pPr>
-            <a:r>
-              <a:rPr sz="1500">
-                <a:solidFill>
-                  <a:srgbClr val="22282E"/>
-                </a:solidFill>
-              </a:rPr>
-              <a:t>•  ... EventCode=1 | stats count by Computer, Image | sort - count</a:t>
-            </a:r>
-          </a:p>
-          <a:p>
-            <a:pPr>
-              <a:spcAft>
-                <a:spcPts val="600"/>
-              </a:spcAft>
-            </a:pPr>
-            <a:r>
-              <a:rPr sz="1500">
-                <a:solidFill>
-                  <a:srgbClr val="22282E"/>
-                </a:solidFill>
-              </a:rPr>
-              <a:t>•  Detecta ejecución sospechosa. Busca intérpretes lanzados por Office:</a:t>
-            </a:r>
-          </a:p>
-          <a:p>
-            <a:pPr>
-              <a:spcAft>
-                <a:spcPts val="600"/>
-              </a:spcAft>
-            </a:pPr>
-            <a:r>
-              <a:rPr sz="1500">
-                <a:solidFill>
-                  <a:srgbClr val="22282E"/>
-                </a:solidFill>
-              </a:rPr>
-              <a:t>•  ... EventCode=1 ParentImage="\\WINWORD.EXE" (Image="\\powershell.exe" OR Image="\\cmd.exe") | table time, Computer, ParentImage, Image, CommandLine</a:t>
-            </a:r>
-          </a:p>
-          <a:p>
-            <a:pPr>
-              <a:spcAft>
-                <a:spcPts val="600"/>
-              </a:spcAft>
-            </a:pPr>
-            <a:r>
-              <a:rPr sz="1500">
-                <a:solidFill>
-                  <a:srgbClr val="22282E"/>
-                </a:solidFill>
-              </a:rPr>
-              <a:t>•  Fuerza bruta de autenticación. Con eventos 4625/4624:</a:t>
+              <a:t>•  SPL (Search Processing Language): lenguaje de consulta de Splunk basado en tuberías (|). Característica: componible, cada comando transforma el resultado del anterior.</a:t>
+            </a:r>
+          </a:p>
+          <a:p>
+            <a:pPr>
+              <a:spcAft>
+                <a:spcPts val="600"/>
+              </a:spcAft>
+            </a:pPr>
+            <a:r>
+              <a:rPr sz="1500">
+                <a:solidFill>
+                  <a:srgbClr val="22282E"/>
+                </a:solidFill>
+              </a:rPr>
+              <a:t>•  stats: agrega eventos por campos (count by user). Característica: pieza central para líneas base y umbrales.</a:t>
+            </a:r>
+          </a:p>
+          <a:p>
+            <a:pPr>
+              <a:spcAft>
+                <a:spcPts val="600"/>
+              </a:spcAft>
+            </a:pPr>
+            <a:r>
+              <a:rPr sz="1500">
+                <a:solidFill>
+                  <a:srgbClr val="22282E"/>
+                </a:solidFill>
+              </a:rPr>
+              <a:t>•  tstats: consulta datos acelerados/indexados sin escanear eventos crudos. Característica: órdenes de magnitud más rápido.</a:t>
+            </a:r>
+          </a:p>
+          <a:p>
+            <a:pPr>
+              <a:spcAft>
+                <a:spcPts val="600"/>
+              </a:spcAft>
+            </a:pPr>
+            <a:r>
+              <a:rPr sz="1500">
+                <a:solidFill>
+                  <a:srgbClr val="22282E"/>
+                </a:solidFill>
+              </a:rPr>
+              <a:t>•  CIM (Common Information Model): esquema de normalización de Splunk. Característica: permite escribir detecciones portables entre fuentes.</a:t>
+            </a:r>
+          </a:p>
+          <a:p>
+            <a:pPr>
+              <a:spcAft>
+                <a:spcPts val="600"/>
+              </a:spcAft>
+            </a:pPr>
+            <a:r>
+              <a:rPr sz="1500">
+                <a:solidFill>
+                  <a:srgbClr val="22282E"/>
+                </a:solidFill>
+              </a:rPr>
+              <a:t>•  Lookup: tabla externa (CSV/KV) para enriquecer (ej. lista de activos críticos). Característica: cruza eventos con contexto de negocio.</a:t>
+            </a:r>
+          </a:p>
+          <a:p>
+            <a:pPr>
+              <a:spcAft>
+                <a:spcPts val="600"/>
+              </a:spcAft>
+            </a:pPr>
+            <a:r>
+              <a:rPr sz="1500">
+                <a:solidFill>
+                  <a:srgbClr val="22282E"/>
+                </a:solidFill>
+              </a:rPr>
+              <a:t>•  Saved search / alert: búsqueda guardada que corre en horario y dispara acciones. Característica: soporta throttling para evitar spam de alertas.</a:t>
+            </a:r>
+          </a:p>
+          <a:p>
+            <a:pPr>
+              <a:spcAft>
+                <a:spcPts val="600"/>
+              </a:spcAft>
+            </a:pPr>
+            <a:r>
+              <a:rPr sz="1500">
+                <a:solidFill>
+                  <a:srgbClr val="22282E"/>
+                </a:solidFill>
+              </a:rPr>
+              <a:t>•  Notable Event: alerta gestionable en Splunk ES con estado, propietario y urgencia. Característica: el objeto de trabajo del analista.</a:t>
             </a:r>
           </a:p>
         </p:txBody>
@@ -4599,7 +5290,7 @@
                   <a:srgbClr val="0B3D2E"/>
                 </a:solidFill>
               </a:rPr>
-              <a:t>✍️ Ejercicios</a:t>
+              <a:t>🔍 Búsqueda razonada — fallos seguidos de éxito</a:t>
             </a:r>
           </a:p>
         </p:txBody>
@@ -4637,82 +5328,52 @@
                   <a:srgbClr val="22282E"/>
                 </a:solidFill>
               </a:rPr>
-              <a:t>•  Escribe una búsqueda que liste los 10 dominios DNS más consultados por host.</a:t>
-            </a:r>
-          </a:p>
-          <a:p>
-            <a:pPr>
-              <a:spcAft>
-                <a:spcPts val="600"/>
-              </a:spcAft>
-            </a:pPr>
-            <a:r>
-              <a:rPr sz="1500">
-                <a:solidFill>
-                  <a:srgbClr val="22282E"/>
-                </a:solidFill>
-              </a:rPr>
-              <a:t>•  Detecta regsvr32.exe o mshta.exe con conexión de red saliente.</a:t>
-            </a:r>
-          </a:p>
-          <a:p>
-            <a:pPr>
-              <a:spcAft>
-                <a:spcPts val="600"/>
-              </a:spcAft>
-            </a:pPr>
-            <a:r>
-              <a:rPr sz="1500">
-                <a:solidFill>
-                  <a:srgbClr val="22282E"/>
-                </a:solidFill>
-              </a:rPr>
-              <a:t>•  Construye una línea base de horas de login por usuario y marca actividad fuera de horario.</a:t>
-            </a:r>
-          </a:p>
-          <a:p>
-            <a:pPr>
-              <a:spcAft>
-                <a:spcPts val="600"/>
-              </a:spcAft>
-            </a:pPr>
-            <a:r>
-              <a:rPr sz="1500">
-                <a:solidFill>
-                  <a:srgbClr val="22282E"/>
-                </a:solidFill>
-              </a:rPr>
-              <a:t>•  Usa eval para clasificar la severidad de un evento en alta/media/baja.</a:t>
-            </a:r>
-          </a:p>
-          <a:p>
-            <a:pPr>
-              <a:spcAft>
-                <a:spcPts val="600"/>
-              </a:spcAft>
-            </a:pPr>
-            <a:r>
-              <a:rPr sz="1500">
-                <a:solidFill>
-                  <a:srgbClr val="22282E"/>
-                </a:solidFill>
-              </a:rPr>
-              <a:t>•  Convierte una búsqueda lenta en una con tstats y mide la diferencia.</a:t>
-            </a:r>
-          </a:p>
-          <a:p>
-            <a:pPr>
-              <a:spcAft>
-                <a:spcPts val="600"/>
-              </a:spcAft>
-            </a:pPr>
-            <a:r>
-              <a:rPr sz="1500">
-                <a:solidFill>
-                  <a:srgbClr val="22282E"/>
-                </a:solidFill>
-              </a:rPr>
-              <a:t>•  Crea un lookup de cuentas de servicio y suprime sus falsos positivos.</a:t>
+              <a:t>•  La intención es identificar una combinación de cuenta y origen con varios fallos y después un éxito. Una primera búsqueda exploratoria conserva detalle:</a:t>
+            </a:r>
+          </a:p>
+          <a:p>
+            <a:pPr>
+              <a:spcAft>
+                <a:spcPts val="600"/>
+              </a:spcAft>
+            </a:pPr>
+            <a:r>
+              <a:rPr sz="1500">
+                <a:solidFill>
+                  <a:srgbClr val="22282E"/>
+                </a:solidFill>
+              </a:rPr>
+              <a:t>•  Solo después de comprobar campos se construye una agregación. Contar fallos y éxitos en la misma ventana no demuestra que el éxito ocurrió después; para esa condición se conservan tiempos o se usa…</a:t>
+            </a:r>
+          </a:p>
+          <a:p>
+            <a:pPr>
+              <a:spcAft>
+                <a:spcPts val="600"/>
+              </a:spcAft>
+            </a:pPr>
+            <a:r>
+              <a:rPr sz="1500">
+                <a:solidFill>
+                  <a:srgbClr val="22282E"/>
+                </a:solidFill>
+              </a:rPr>
+              <a:t>•  La búsqueda de producción añade ventana solapada por retraso de ingesta y una clave de deduplicación. Una lookup identifica cuentas de servicio, pero no las excluye por completo: cambia el contexto y…</a:t>
+            </a:r>
+          </a:p>
+          <a:p>
+            <a:pPr>
+              <a:spcAft>
+                <a:spcPts val="600"/>
+              </a:spcAft>
+            </a:pPr>
+            <a:r>
+              <a:rPr sz="1500">
+                <a:solidFill>
+                  <a:srgbClr val="22282E"/>
+                </a:solidFill>
+              </a:rPr>
+              <a:t>•  Antes de migrar a tstats, se mapea la fuente al dataset CIM correspondiente y se compara resultado con SPL sobre eventos crudos. Si una fuente no puebla action, la búsqueda acelerada pierde casos…</a:t>
             </a:r>
           </a:p>
         </p:txBody>
@@ -4763,7 +5424,7 @@
                   <a:srgbClr val="0B3D2E"/>
                 </a:solidFill>
               </a:rPr>
-              <a:t>📝 Reto verificable</a:t>
+              <a:t>✅ Criterio de dominio</a:t>
             </a:r>
           </a:p>
         </p:txBody>
@@ -4801,7 +5462,7 @@
                   <a:srgbClr val="22282E"/>
                 </a:solidFill>
               </a:rPr>
-              <a:t>•  Entrega tres búsquedas SPL de detección con su explicación y una de ellas convertida en alerta programada con throttling. Criterio de aceptación: al menos una búsqueda detecta correctamente un patrón malicioso simulado en tu laboratorio (p. ej. Office→PowerShell) sin disparar con la actividad benigna de línea base, y la alerta guardada aparece en el listado de saved searches ejecutándose.</a:t>
+              <a:t>•  El alumno explica cada comando, demuestra un positivo y un negativo, mide retraso y ejecución, y documenta cualquier excepción con vencimiento. Copiar una consulta que devuelve filas sin justificar…</a:t>
             </a:r>
           </a:p>
         </p:txBody>
